--- a/docs/content/two_way_anova/two_way_anova_lecture.pptx
+++ b/docs/content/two_way_anova/two_way_anova_lecture.pptx
@@ -5626,8 +5626,8 @@
         </p:blipFill>
         <p:spPr bwMode="auto">
           <a:xfrm>
-            <a:off x="6121400" y="825500"/>
-            <a:ext cx="2781300" cy="4152900"/>
+            <a:off x="6184900" y="660400"/>
+            <a:ext cx="2654300" cy="3962400"/>
           </a:xfrm>
           <a:prstGeom prst="rect">
             <a:avLst/>
@@ -5640,6 +5640,38 @@
           </a:ln>
         </p:spPr>
       </p:pic>
+      <p:sp>
+        <p:nvSpPr>
+          <p:cNvPr id="1" name="TextBox 3"/>
+          <p:cNvSpPr txBox="1"/>
+          <p:nvPr>
+            <p:ph idx="1"/>
+          </p:nvPr>
+        </p:nvSpPr>
+        <p:spPr>
+          <a:xfrm>
+            <a:off x="6121400" y="4622800"/>
+            <a:ext cx="2781300" cy="508000"/>
+          </a:xfrm>
+          <a:prstGeom prst="rect">
+            <a:avLst/>
+          </a:prstGeom>
+          <a:noFill/>
+        </p:spPr>
+        <p:txBody>
+          <a:bodyPr/>
+          <a:lstStyle/>
+          <a:p>
+            <a:pPr lvl="0" indent="0" marL="0" algn="ctr">
+              <a:buNone/>
+            </a:pPr>
+            <a:r>
+              <a:rPr/>
+              <a:t>XKCD comic listing p-value ranges with increasingly tongue-in-cheek interpretations, from ‘Highly Significant’ at p under 0.03 down through ‘On the edge of significance’ and ‘Hey, look at this interesting subgroup analysis’ at p &gt;= 0.1, captioned ‘If all else fails, use significant at a p&gt;0.05 level and hope no one notices’ — a joke about p-hacking and misusing significance thresholds.</a:t>
+            </a:r>
+          </a:p>
+        </p:txBody>
+      </p:sp>
     </p:spTree>
   </p:cSld>
 </p:sld>
@@ -6336,7 +6368,7 @@
         </p:blipFill>
         <p:spPr bwMode="auto">
           <a:xfrm>
-            <a:off x="6121400" y="2209800"/>
+            <a:off x="6121400" y="1955800"/>
             <a:ext cx="2781300" cy="1371600"/>
           </a:xfrm>
           <a:prstGeom prst="rect">
@@ -6350,6 +6382,100 @@
           </a:ln>
         </p:spPr>
       </p:pic>
+      <p:sp>
+        <p:nvSpPr>
+          <p:cNvPr id="1" name="TextBox 3"/>
+          <p:cNvSpPr txBox="1"/>
+          <p:nvPr>
+            <p:ph idx="1"/>
+          </p:nvPr>
+        </p:nvSpPr>
+        <p:spPr>
+          <a:xfrm>
+            <a:off x="6121400" y="4622800"/>
+            <a:ext cx="2781300" cy="508000"/>
+          </a:xfrm>
+          <a:prstGeom prst="rect">
+            <a:avLst/>
+          </a:prstGeom>
+          <a:noFill/>
+        </p:spPr>
+        <p:txBody>
+          <a:bodyPr/>
+          <a:lstStyle/>
+          <a:p>
+            <a:pPr lvl="0" indent="0" marL="0" algn="ctr">
+              <a:buNone/>
+            </a:pPr>
+            <a:r>
+              <a:rPr/>
+              <a:t>Full two-way ANOVA table listing Source (A, B, AB, Residual, Total), each with its sum-of-squares formula, degrees of freedom (p-1, q-1, (p-1)(q-1), pq(n-1), pqn-1), and mean-square formula.</a:t>
+            </a:r>
+          </a:p>
+        </p:txBody>
+      </p:sp>
+      <p:pic>
+        <p:nvPicPr>
+          <p:cNvPr descr="images/clipboard-4251414171.png" id="0" name="Picture 1"/>
+          <p:cNvPicPr>
+            <a:picLocks noGrp="1" noChangeAspect="1"/>
+          </p:cNvPicPr>
+          <p:nvPr/>
+        </p:nvPicPr>
+        <p:blipFill>
+          <a:blip r:embed="rId3"/>
+          <a:stretch>
+            <a:fillRect/>
+          </a:stretch>
+        </p:blipFill>
+        <p:spPr bwMode="auto">
+          <a:xfrm>
+            <a:off x="6121400" y="2222500"/>
+            <a:ext cx="2781300" cy="838200"/>
+          </a:xfrm>
+          <a:prstGeom prst="rect">
+            <a:avLst/>
+          </a:prstGeom>
+          <a:noFill/>
+          <a:ln w="9525">
+            <a:noFill/>
+            <a:headEnd/>
+            <a:tailEnd/>
+          </a:ln>
+        </p:spPr>
+      </p:pic>
+      <p:sp>
+        <p:nvSpPr>
+          <p:cNvPr id="1" name="TextBox 3"/>
+          <p:cNvSpPr txBox="1"/>
+          <p:nvPr>
+            <p:ph idx="1"/>
+          </p:nvPr>
+        </p:nvSpPr>
+        <p:spPr>
+          <a:xfrm>
+            <a:off x="6121400" y="4622800"/>
+            <a:ext cx="2781300" cy="508000"/>
+          </a:xfrm>
+          <a:prstGeom prst="rect">
+            <a:avLst/>
+          </a:prstGeom>
+          <a:noFill/>
+        </p:spPr>
+        <p:txBody>
+          <a:bodyPr/>
+          <a:lstStyle/>
+          <a:p>
+            <a:pPr lvl="0" indent="0" marL="0" algn="ctr">
+              <a:buNone/>
+            </a:pPr>
+            <a:r>
+              <a:rPr/>
+              <a:t>Table of penguin body mass cell means and marginal (emmean) values by species (rows: Adelie, Chinstrap, Gentoo) and sex (columns: female, male), used to compute SS_A from the species row means.</a:t>
+            </a:r>
+          </a:p>
+        </p:txBody>
+      </p:sp>
     </p:spTree>
   </p:cSld>
 </p:sld>
@@ -6474,7 +6600,7 @@
         </p:blipFill>
         <p:spPr bwMode="auto">
           <a:xfrm>
-            <a:off x="6121400" y="2209800"/>
+            <a:off x="6121400" y="1955800"/>
             <a:ext cx="2781300" cy="1371600"/>
           </a:xfrm>
           <a:prstGeom prst="rect">
@@ -6488,6 +6614,100 @@
           </a:ln>
         </p:spPr>
       </p:pic>
+      <p:sp>
+        <p:nvSpPr>
+          <p:cNvPr id="1" name="TextBox 3"/>
+          <p:cNvSpPr txBox="1"/>
+          <p:nvPr>
+            <p:ph idx="1"/>
+          </p:nvPr>
+        </p:nvSpPr>
+        <p:spPr>
+          <a:xfrm>
+            <a:off x="6121400" y="4622800"/>
+            <a:ext cx="2781300" cy="508000"/>
+          </a:xfrm>
+          <a:prstGeom prst="rect">
+            <a:avLst/>
+          </a:prstGeom>
+          <a:noFill/>
+        </p:spPr>
+        <p:txBody>
+          <a:bodyPr/>
+          <a:lstStyle/>
+          <a:p>
+            <a:pPr lvl="0" indent="0" marL="0" algn="ctr">
+              <a:buNone/>
+            </a:pPr>
+            <a:r>
+              <a:rPr/>
+              <a:t>The same two-way ANOVA table (Source, SS, df, MS for A, B, AB, Residual, Total) repeated here for computing SS_B.</a:t>
+            </a:r>
+          </a:p>
+        </p:txBody>
+      </p:sp>
+      <p:pic>
+        <p:nvPicPr>
+          <p:cNvPr descr="images/clipboard-4251414171.png" id="0" name="Picture 1"/>
+          <p:cNvPicPr>
+            <a:picLocks noGrp="1" noChangeAspect="1"/>
+          </p:cNvPicPr>
+          <p:nvPr/>
+        </p:nvPicPr>
+        <p:blipFill>
+          <a:blip r:embed="rId3"/>
+          <a:stretch>
+            <a:fillRect/>
+          </a:stretch>
+        </p:blipFill>
+        <p:spPr bwMode="auto">
+          <a:xfrm>
+            <a:off x="6121400" y="2222500"/>
+            <a:ext cx="2781300" cy="838200"/>
+          </a:xfrm>
+          <a:prstGeom prst="rect">
+            <a:avLst/>
+          </a:prstGeom>
+          <a:noFill/>
+          <a:ln w="9525">
+            <a:noFill/>
+            <a:headEnd/>
+            <a:tailEnd/>
+          </a:ln>
+        </p:spPr>
+      </p:pic>
+      <p:sp>
+        <p:nvSpPr>
+          <p:cNvPr id="1" name="TextBox 3"/>
+          <p:cNvSpPr txBox="1"/>
+          <p:nvPr>
+            <p:ph idx="1"/>
+          </p:nvPr>
+        </p:nvSpPr>
+        <p:spPr>
+          <a:xfrm>
+            <a:off x="6121400" y="4622800"/>
+            <a:ext cx="2781300" cy="508000"/>
+          </a:xfrm>
+          <a:prstGeom prst="rect">
+            <a:avLst/>
+          </a:prstGeom>
+          <a:noFill/>
+        </p:spPr>
+        <p:txBody>
+          <a:bodyPr/>
+          <a:lstStyle/>
+          <a:p>
+            <a:pPr lvl="0" indent="0" marL="0" algn="ctr">
+              <a:buNone/>
+            </a:pPr>
+            <a:r>
+              <a:rPr/>
+              <a:t>The same penguin body-mass cell-means and marginal-means table repeated here, used to compute SS_B from the sex column means.</a:t>
+            </a:r>
+          </a:p>
+        </p:txBody>
+      </p:sp>
     </p:spTree>
   </p:cSld>
 </p:sld>
@@ -6610,7 +6830,7 @@
         </p:blipFill>
         <p:spPr bwMode="auto">
           <a:xfrm>
-            <a:off x="6121400" y="2209800"/>
+            <a:off x="6121400" y="1955800"/>
             <a:ext cx="2781300" cy="1358900"/>
           </a:xfrm>
           <a:prstGeom prst="rect">
@@ -6624,6 +6844,100 @@
           </a:ln>
         </p:spPr>
       </p:pic>
+      <p:sp>
+        <p:nvSpPr>
+          <p:cNvPr id="1" name="TextBox 3"/>
+          <p:cNvSpPr txBox="1"/>
+          <p:nvPr>
+            <p:ph idx="1"/>
+          </p:nvPr>
+        </p:nvSpPr>
+        <p:spPr>
+          <a:xfrm>
+            <a:off x="6121400" y="4622800"/>
+            <a:ext cx="2781300" cy="508000"/>
+          </a:xfrm>
+          <a:prstGeom prst="rect">
+            <a:avLst/>
+          </a:prstGeom>
+          <a:noFill/>
+        </p:spPr>
+        <p:txBody>
+          <a:bodyPr/>
+          <a:lstStyle/>
+          <a:p>
+            <a:pPr lvl="0" indent="0" marL="0" algn="ctr">
+              <a:buNone/>
+            </a:pPr>
+            <a:r>
+              <a:rPr/>
+              <a:t>The same two-way ANOVA table with the AB (interaction) row outlined in red, highlighting its sum-of-squares, degrees of freedom (p-1)(q-1), and mean-square formulas.</a:t>
+            </a:r>
+          </a:p>
+        </p:txBody>
+      </p:sp>
+      <p:pic>
+        <p:nvPicPr>
+          <p:cNvPr descr="images/clipboard-4251414171.png" id="0" name="Picture 1"/>
+          <p:cNvPicPr>
+            <a:picLocks noGrp="1" noChangeAspect="1"/>
+          </p:cNvPicPr>
+          <p:nvPr/>
+        </p:nvPicPr>
+        <p:blipFill>
+          <a:blip r:embed="rId3"/>
+          <a:stretch>
+            <a:fillRect/>
+          </a:stretch>
+        </p:blipFill>
+        <p:spPr bwMode="auto">
+          <a:xfrm>
+            <a:off x="6121400" y="2222500"/>
+            <a:ext cx="2781300" cy="838200"/>
+          </a:xfrm>
+          <a:prstGeom prst="rect">
+            <a:avLst/>
+          </a:prstGeom>
+          <a:noFill/>
+          <a:ln w="9525">
+            <a:noFill/>
+            <a:headEnd/>
+            <a:tailEnd/>
+          </a:ln>
+        </p:spPr>
+      </p:pic>
+      <p:sp>
+        <p:nvSpPr>
+          <p:cNvPr id="1" name="TextBox 3"/>
+          <p:cNvSpPr txBox="1"/>
+          <p:nvPr>
+            <p:ph idx="1"/>
+          </p:nvPr>
+        </p:nvSpPr>
+        <p:spPr>
+          <a:xfrm>
+            <a:off x="6121400" y="4622800"/>
+            <a:ext cx="2781300" cy="508000"/>
+          </a:xfrm>
+          <a:prstGeom prst="rect">
+            <a:avLst/>
+          </a:prstGeom>
+          <a:noFill/>
+        </p:spPr>
+        <p:txBody>
+          <a:bodyPr/>
+          <a:lstStyle/>
+          <a:p>
+            <a:pPr lvl="0" indent="0" marL="0" algn="ctr">
+              <a:buNone/>
+            </a:pPr>
+            <a:r>
+              <a:rPr/>
+              <a:t>The same penguin body-mass cell-means and marginal-means table repeated here, used to compute SS_AB from how each cell mean deviates from its row and column marginal means.</a:t>
+            </a:r>
+          </a:p>
+        </p:txBody>
+      </p:sp>
     </p:spTree>
   </p:cSld>
 </p:sld>
@@ -7703,7 +8017,7 @@
         </p:blipFill>
         <p:spPr bwMode="auto">
           <a:xfrm>
-            <a:off x="6121400" y="2070100"/>
+            <a:off x="6121400" y="1816100"/>
             <a:ext cx="2781300" cy="1651000"/>
           </a:xfrm>
           <a:prstGeom prst="rect">
@@ -7717,6 +8031,38 @@
           </a:ln>
         </p:spPr>
       </p:pic>
+      <p:sp>
+        <p:nvSpPr>
+          <p:cNvPr id="1" name="TextBox 3"/>
+          <p:cNvSpPr txBox="1"/>
+          <p:nvPr>
+            <p:ph idx="1"/>
+          </p:nvPr>
+        </p:nvSpPr>
+        <p:spPr>
+          <a:xfrm>
+            <a:off x="6121400" y="4622800"/>
+            <a:ext cx="2781300" cy="508000"/>
+          </a:xfrm>
+          <a:prstGeom prst="rect">
+            <a:avLst/>
+          </a:prstGeom>
+          <a:noFill/>
+        </p:spPr>
+        <p:txBody>
+          <a:bodyPr/>
+          <a:lstStyle/>
+          <a:p>
+            <a:pPr lvl="0" indent="0" marL="0" algn="ctr">
+              <a:buNone/>
+            </a:pPr>
+            <a:r>
+              <a:rPr/>
+              <a:t>Cartoon illustration of the three penguin species used in this lecture’s dataset, each labeled: Chinstrap, Gentoo, and Adelie.</a:t>
+            </a:r>
+          </a:p>
+        </p:txBody>
+      </p:sp>
     </p:spTree>
   </p:cSld>
 </p:sld>
@@ -8169,7 +8515,7 @@
         </p:blipFill>
         <p:spPr bwMode="auto">
           <a:xfrm>
-            <a:off x="6121400" y="1701800"/>
+            <a:off x="6121400" y="1447800"/>
             <a:ext cx="2781300" cy="2387600"/>
           </a:xfrm>
           <a:prstGeom prst="rect">
@@ -8183,6 +8529,38 @@
           </a:ln>
         </p:spPr>
       </p:pic>
+      <p:sp>
+        <p:nvSpPr>
+          <p:cNvPr id="1" name="TextBox 3"/>
+          <p:cNvSpPr txBox="1"/>
+          <p:nvPr>
+            <p:ph idx="1"/>
+          </p:nvPr>
+        </p:nvSpPr>
+        <p:spPr>
+          <a:xfrm>
+            <a:off x="6121400" y="4622800"/>
+            <a:ext cx="2781300" cy="508000"/>
+          </a:xfrm>
+          <a:prstGeom prst="rect">
+            <a:avLst/>
+          </a:prstGeom>
+          <a:noFill/>
+        </p:spPr>
+        <p:txBody>
+          <a:bodyPr/>
+          <a:lstStyle/>
+          <a:p>
+            <a:pPr lvl="0" indent="0" marL="0" algn="ctr">
+              <a:buNone/>
+            </a:pPr>
+            <a:r>
+              <a:rPr/>
+              <a:t>Four standard regression diagnostic plots for the two-way ANOVA model, arranged 2x2: residuals vs. fitted, normal Q-Q, scale-location, and residuals vs. leverage, generated automatically with ggfortify::autoplot().</a:t>
+            </a:r>
+          </a:p>
+        </p:txBody>
+      </p:sp>
     </p:spTree>
   </p:cSld>
 </p:sld>
@@ -9402,7 +9780,7 @@
         </p:blipFill>
         <p:spPr bwMode="auto">
           <a:xfrm>
-            <a:off x="6121400" y="1092200"/>
+            <a:off x="6121400" y="838200"/>
             <a:ext cx="2781300" cy="3594100"/>
           </a:xfrm>
           <a:prstGeom prst="rect">
@@ -9416,6 +9794,100 @@
           </a:ln>
         </p:spPr>
       </p:pic>
+      <p:sp>
+        <p:nvSpPr>
+          <p:cNvPr id="1" name="TextBox 3"/>
+          <p:cNvSpPr txBox="1"/>
+          <p:nvPr>
+            <p:ph idx="1"/>
+          </p:nvPr>
+        </p:nvSpPr>
+        <p:spPr>
+          <a:xfrm>
+            <a:off x="6121400" y="4622800"/>
+            <a:ext cx="2781300" cy="508000"/>
+          </a:xfrm>
+          <a:prstGeom prst="rect">
+            <a:avLst/>
+          </a:prstGeom>
+          <a:noFill/>
+        </p:spPr>
+        <p:txBody>
+          <a:bodyPr/>
+          <a:lstStyle/>
+          <a:p>
+            <a:pPr lvl="0" indent="0" marL="0" algn="ctr">
+              <a:buNone/>
+            </a:pPr>
+            <a:r>
+              <a:rPr/>
+              <a:t>Diagram of a fertilizer bag and a smiling sun icon, each with an arrow pointing down to a small green seedling, illustrating fertilizer and sunlight as two separate factors that can each affect plant biomass.</a:t>
+            </a:r>
+          </a:p>
+        </p:txBody>
+      </p:sp>
+      <p:pic>
+        <p:nvPicPr>
+          <p:cNvPr descr="images/clipboard-327078330.png" id="0" name="Picture 1"/>
+          <p:cNvPicPr>
+            <a:picLocks noGrp="1" noChangeAspect="1"/>
+          </p:cNvPicPr>
+          <p:nvPr/>
+        </p:nvPicPr>
+        <p:blipFill>
+          <a:blip r:embed="rId3"/>
+          <a:stretch>
+            <a:fillRect/>
+          </a:stretch>
+        </p:blipFill>
+        <p:spPr bwMode="auto">
+          <a:xfrm>
+            <a:off x="6121400" y="1041400"/>
+            <a:ext cx="2781300" cy="3200400"/>
+          </a:xfrm>
+          <a:prstGeom prst="rect">
+            <a:avLst/>
+          </a:prstGeom>
+          <a:noFill/>
+          <a:ln w="9525">
+            <a:noFill/>
+            <a:headEnd/>
+            <a:tailEnd/>
+          </a:ln>
+        </p:spPr>
+      </p:pic>
+      <p:sp>
+        <p:nvSpPr>
+          <p:cNvPr id="1" name="TextBox 3"/>
+          <p:cNvSpPr txBox="1"/>
+          <p:nvPr>
+            <p:ph idx="1"/>
+          </p:nvPr>
+        </p:nvSpPr>
+        <p:spPr>
+          <a:xfrm>
+            <a:off x="6121400" y="4622800"/>
+            <a:ext cx="2781300" cy="508000"/>
+          </a:xfrm>
+          <a:prstGeom prst="rect">
+            <a:avLst/>
+          </a:prstGeom>
+          <a:noFill/>
+        </p:spPr>
+        <p:txBody>
+          <a:bodyPr/>
+          <a:lstStyle/>
+          <a:p>
+            <a:pPr lvl="0" indent="0" marL="0" algn="ctr">
+              <a:buNone/>
+            </a:pPr>
+            <a:r>
+              <a:rPr/>
+              <a:t>The palmerpenguins R package hex-sticker logo, showing simple cartoon illustrations of the three penguin species (Adelie, Chinstrap, Gentoo) used in this lecture’s dataset.</a:t>
+            </a:r>
+          </a:p>
+        </p:txBody>
+      </p:sp>
     </p:spTree>
   </p:cSld>
 </p:sld>
@@ -10702,7 +11174,7 @@
         </p:blipFill>
         <p:spPr bwMode="auto">
           <a:xfrm>
-            <a:off x="127000" y="1600200"/>
+            <a:off x="127000" y="1346200"/>
             <a:ext cx="4432300" cy="2628900"/>
           </a:xfrm>
           <a:prstGeom prst="rect">
@@ -10716,6 +11188,38 @@
           </a:ln>
         </p:spPr>
       </p:pic>
+      <p:sp>
+        <p:nvSpPr>
+          <p:cNvPr id="1" name="TextBox 3"/>
+          <p:cNvSpPr txBox="1"/>
+          <p:nvPr>
+            <p:ph idx="1"/>
+          </p:nvPr>
+        </p:nvSpPr>
+        <p:spPr>
+          <a:xfrm>
+            <a:off x="127000" y="4064000"/>
+            <a:ext cx="4432300" cy="508000"/>
+          </a:xfrm>
+          <a:prstGeom prst="rect">
+            <a:avLst/>
+          </a:prstGeom>
+          <a:noFill/>
+        </p:spPr>
+        <p:txBody>
+          <a:bodyPr/>
+          <a:lstStyle/>
+          <a:p>
+            <a:pPr lvl="0" indent="0" marL="0" algn="ctr">
+              <a:buNone/>
+            </a:pPr>
+            <a:r>
+              <a:rPr/>
+              <a:t>Cartoon illustration of the three penguin species used in this lecture’s dataset, each labeled: Chinstrap, Gentoo, and Adelie.</a:t>
+            </a:r>
+          </a:p>
+        </p:txBody>
+      </p:sp>
       <p:pic>
         <p:nvPicPr>
           <p:cNvPr descr="images/clipboard-2737690912.png" id="0" name="Picture 1"/>
@@ -10732,8 +11236,8 @@
         </p:blipFill>
         <p:spPr bwMode="auto">
           <a:xfrm>
-            <a:off x="5829300" y="1295400"/>
-            <a:ext cx="1879600" cy="3276600"/>
+            <a:off x="5981700" y="1295400"/>
+            <a:ext cx="1587500" cy="2768600"/>
           </a:xfrm>
           <a:prstGeom prst="rect">
             <a:avLst/>
@@ -10746,6 +11250,38 @@
           </a:ln>
         </p:spPr>
       </p:pic>
+      <p:sp>
+        <p:nvSpPr>
+          <p:cNvPr id="1" name="TextBox 3"/>
+          <p:cNvSpPr txBox="1"/>
+          <p:nvPr>
+            <p:ph idx="1"/>
+          </p:nvPr>
+        </p:nvSpPr>
+        <p:spPr>
+          <a:xfrm>
+            <a:off x="4749800" y="4064000"/>
+            <a:ext cx="4038600" cy="508000"/>
+          </a:xfrm>
+          <a:prstGeom prst="rect">
+            <a:avLst/>
+          </a:prstGeom>
+          <a:noFill/>
+        </p:spPr>
+        <p:txBody>
+          <a:bodyPr/>
+          <a:lstStyle/>
+          <a:p>
+            <a:pPr lvl="0" indent="0" marL="0" algn="ctr">
+              <a:buNone/>
+            </a:pPr>
+            <a:r>
+              <a:rPr/>
+              <a:t>Diagram contrasting a crossed design, where both levels of Factor 1 (A, B) connect to every level of Factor 2 (a, b, c, d), against a nested design below it, where each level of Factor 1 connects only to its own subset of (random) Factor 2 levels, both feeding into individual observations (Schielzth &amp; Nakagawa 2013).</a:t>
+            </a:r>
+          </a:p>
+        </p:txBody>
+      </p:sp>
     </p:spTree>
   </p:cSld>
 </p:sld>
@@ -11025,7 +11561,7 @@
         </p:blipFill>
         <p:spPr bwMode="auto">
           <a:xfrm>
-            <a:off x="6121400" y="2324100"/>
+            <a:off x="6121400" y="2070100"/>
             <a:ext cx="2781300" cy="1143000"/>
           </a:xfrm>
           <a:prstGeom prst="rect">
@@ -11039,6 +11575,38 @@
           </a:ln>
         </p:spPr>
       </p:pic>
+      <p:sp>
+        <p:nvSpPr>
+          <p:cNvPr id="1" name="TextBox 3"/>
+          <p:cNvSpPr txBox="1"/>
+          <p:nvPr>
+            <p:ph idx="1"/>
+          </p:nvPr>
+        </p:nvSpPr>
+        <p:spPr>
+          <a:xfrm>
+            <a:off x="6121400" y="4622800"/>
+            <a:ext cx="2781300" cy="508000"/>
+          </a:xfrm>
+          <a:prstGeom prst="rect">
+            <a:avLst/>
+          </a:prstGeom>
+          <a:noFill/>
+        </p:spPr>
+        <p:txBody>
+          <a:bodyPr/>
+          <a:lstStyle/>
+          <a:p>
+            <a:pPr lvl="0" indent="0" marL="0" algn="ctr">
+              <a:buNone/>
+            </a:pPr>
+            <a:r>
+              <a:rPr/>
+              <a:t>Simple grid diagram of a factorial design with Factor A across the columns (levels 1-4) and Factor B down the rows (levels 1-3), with an ‘XX’ marking every cell, showing every combination of the two factors is represented.</a:t>
+            </a:r>
+          </a:p>
+        </p:txBody>
+      </p:sp>
     </p:spTree>
   </p:cSld>
 </p:sld>
